--- a/tests/fixtures/adversarial/decks/NEW-04-builds-and-exit-on-last-click.pptx
+++ b/tests/fixtures/adversarial/decks/NEW-04-builds-and-exit-on-last-click.pptx
@@ -5,8 +5,8 @@
     <p:sldMasterId id="2147483648" r:id="rId1"/>
   </p:sldMasterIdLst>
   <p:sldIdLst>
-    <p:sldId id="256" r:id="rId7"/>
-    <p:sldId id="257" r:id="rId8"/>
+    <p:sldId id="256" r:id="rId2"/>
+    <p:sldId id="257" r:id="rId3"/>
   </p:sldIdLst>
   <p:sldSz cx="9144000" cy="6858000" type="screen4x3"/>
   <p:notesSz cx="6858000" cy="9144000"/>
@@ -105,6 +105,22 @@
       </a:defRPr>
     </a:lvl9pPr>
   </p:defaultTextStyle>
+  <p:extLst>
+    <p:ext uri="{EFAFB233-063F-42B5-8137-9DF3F51BA10A}">
+      <p15:sldGuideLst xmlns:p15="http://schemas.microsoft.com/office/powerpoint/2012/main">
+        <p15:guide id="1" orient="horz" pos="2160">
+          <p15:clr>
+            <a:srgbClr val="A4A3A4"/>
+          </p15:clr>
+        </p15:guide>
+        <p15:guide id="2" pos="2880">
+          <p15:clr>
+            <a:srgbClr val="A4A3A4"/>
+          </p15:clr>
+        </p15:guide>
+      </p15:sldGuideLst>
+    </p:ext>
+  </p:extLst>
 </p:presentation>
 </file>
 
@@ -146,10 +162,9 @@
           <a:lstStyle/>
           <a:p>
             <a:r>
-              <a:rPr lang="en-US" smtClean="0"/>
+              <a:rPr lang="en-US"/>
               <a:t>Click to edit Master title style</a:t>
             </a:r>
-            <a:endParaRPr lang="en-US"/>
           </a:p>
         </p:txBody>
       </p:sp>
@@ -265,10 +280,9 @@
           </a:lstStyle>
           <a:p>
             <a:r>
-              <a:rPr lang="en-US" smtClean="0"/>
+              <a:rPr lang="en-US"/>
               <a:t>Click to edit Master subtitle style</a:t>
             </a:r>
-            <a:endParaRPr lang="en-US"/>
           </a:p>
         </p:txBody>
       </p:sp>
@@ -289,7 +303,7 @@
           <a:p>
             <a:fld id="{5BCAD085-E8A6-8845-BD4E-CB4CCA059FC4}" type="datetimeFigureOut">
               <a:rPr lang="en-US" smtClean="0"/>
-              <a:t>1/27/13</a:t>
+              <a:t>10/13/26</a:t>
             </a:fld>
             <a:endParaRPr lang="en-US"/>
           </a:p>
@@ -383,10 +397,9 @@
           <a:lstStyle/>
           <a:p>
             <a:r>
-              <a:rPr lang="en-US" smtClean="0"/>
+              <a:rPr lang="en-US"/>
               <a:t>Click to edit Master title style</a:t>
             </a:r>
-            <a:endParaRPr lang="en-US"/>
           </a:p>
         </p:txBody>
       </p:sp>
@@ -407,38 +420,37 @@
           <a:p>
             <a:pPr lvl="0"/>
             <a:r>
-              <a:rPr lang="en-US" smtClean="0"/>
+              <a:rPr lang="en-US"/>
               <a:t>Click to edit Master text styles</a:t>
             </a:r>
           </a:p>
           <a:p>
             <a:pPr lvl="1"/>
             <a:r>
-              <a:rPr lang="en-US" smtClean="0"/>
+              <a:rPr lang="en-US"/>
               <a:t>Second level</a:t>
             </a:r>
           </a:p>
           <a:p>
             <a:pPr lvl="2"/>
             <a:r>
-              <a:rPr lang="en-US" smtClean="0"/>
+              <a:rPr lang="en-US"/>
               <a:t>Third level</a:t>
             </a:r>
           </a:p>
           <a:p>
             <a:pPr lvl="3"/>
             <a:r>
-              <a:rPr lang="en-US" smtClean="0"/>
+              <a:rPr lang="en-US"/>
               <a:t>Fourth level</a:t>
             </a:r>
           </a:p>
           <a:p>
             <a:pPr lvl="4"/>
             <a:r>
-              <a:rPr lang="en-US" smtClean="0"/>
+              <a:rPr lang="en-US"/>
               <a:t>Fifth level</a:t>
             </a:r>
-            <a:endParaRPr lang="en-US"/>
           </a:p>
         </p:txBody>
       </p:sp>
@@ -459,7 +471,7 @@
           <a:p>
             <a:fld id="{5BCAD085-E8A6-8845-BD4E-CB4CCA059FC4}" type="datetimeFigureOut">
               <a:rPr lang="en-US" smtClean="0"/>
-              <a:t>1/27/13</a:t>
+              <a:t>10/13/26</a:t>
             </a:fld>
             <a:endParaRPr lang="en-US"/>
           </a:p>
@@ -558,10 +570,9 @@
           <a:lstStyle/>
           <a:p>
             <a:r>
-              <a:rPr lang="en-US" smtClean="0"/>
+              <a:rPr lang="en-US"/>
               <a:t>Click to edit Master title style</a:t>
             </a:r>
-            <a:endParaRPr lang="en-US"/>
           </a:p>
         </p:txBody>
       </p:sp>
@@ -587,38 +598,37 @@
           <a:p>
             <a:pPr lvl="0"/>
             <a:r>
-              <a:rPr lang="en-US" smtClean="0"/>
+              <a:rPr lang="en-US"/>
               <a:t>Click to edit Master text styles</a:t>
             </a:r>
           </a:p>
           <a:p>
             <a:pPr lvl="1"/>
             <a:r>
-              <a:rPr lang="en-US" smtClean="0"/>
+              <a:rPr lang="en-US"/>
               <a:t>Second level</a:t>
             </a:r>
           </a:p>
           <a:p>
             <a:pPr lvl="2"/>
             <a:r>
-              <a:rPr lang="en-US" smtClean="0"/>
+              <a:rPr lang="en-US"/>
               <a:t>Third level</a:t>
             </a:r>
           </a:p>
           <a:p>
             <a:pPr lvl="3"/>
             <a:r>
-              <a:rPr lang="en-US" smtClean="0"/>
+              <a:rPr lang="en-US"/>
               <a:t>Fourth level</a:t>
             </a:r>
           </a:p>
           <a:p>
             <a:pPr lvl="4"/>
             <a:r>
-              <a:rPr lang="en-US" smtClean="0"/>
+              <a:rPr lang="en-US"/>
               <a:t>Fifth level</a:t>
             </a:r>
-            <a:endParaRPr lang="en-US"/>
           </a:p>
         </p:txBody>
       </p:sp>
@@ -639,7 +649,7 @@
           <a:p>
             <a:fld id="{5BCAD085-E8A6-8845-BD4E-CB4CCA059FC4}" type="datetimeFigureOut">
               <a:rPr lang="en-US" smtClean="0"/>
-              <a:t>1/27/13</a:t>
+              <a:t>10/13/26</a:t>
             </a:fld>
             <a:endParaRPr lang="en-US"/>
           </a:p>
@@ -733,10 +743,9 @@
           <a:lstStyle/>
           <a:p>
             <a:r>
-              <a:rPr lang="en-US" smtClean="0"/>
+              <a:rPr lang="en-US"/>
               <a:t>Click to edit Master title style</a:t>
             </a:r>
-            <a:endParaRPr lang="en-US"/>
           </a:p>
         </p:txBody>
       </p:sp>
@@ -757,38 +766,37 @@
           <a:p>
             <a:pPr lvl="0"/>
             <a:r>
-              <a:rPr lang="en-US" smtClean="0"/>
+              <a:rPr lang="en-US"/>
               <a:t>Click to edit Master text styles</a:t>
             </a:r>
           </a:p>
           <a:p>
             <a:pPr lvl="1"/>
             <a:r>
-              <a:rPr lang="en-US" smtClean="0"/>
+              <a:rPr lang="en-US"/>
               <a:t>Second level</a:t>
             </a:r>
           </a:p>
           <a:p>
             <a:pPr lvl="2"/>
             <a:r>
-              <a:rPr lang="en-US" smtClean="0"/>
+              <a:rPr lang="en-US"/>
               <a:t>Third level</a:t>
             </a:r>
           </a:p>
           <a:p>
             <a:pPr lvl="3"/>
             <a:r>
-              <a:rPr lang="en-US" smtClean="0"/>
+              <a:rPr lang="en-US"/>
               <a:t>Fourth level</a:t>
             </a:r>
           </a:p>
           <a:p>
             <a:pPr lvl="4"/>
             <a:r>
-              <a:rPr lang="en-US" smtClean="0"/>
+              <a:rPr lang="en-US"/>
               <a:t>Fifth level</a:t>
             </a:r>
-            <a:endParaRPr lang="en-US"/>
           </a:p>
         </p:txBody>
       </p:sp>
@@ -809,7 +817,7 @@
           <a:p>
             <a:fld id="{5BCAD085-E8A6-8845-BD4E-CB4CCA059FC4}" type="datetimeFigureOut">
               <a:rPr lang="en-US" smtClean="0"/>
-              <a:t>1/27/13</a:t>
+              <a:t>10/13/26</a:t>
             </a:fld>
             <a:endParaRPr lang="en-US"/>
           </a:p>
@@ -912,10 +920,9 @@
           </a:lstStyle>
           <a:p>
             <a:r>
-              <a:rPr lang="en-US" smtClean="0"/>
+              <a:rPr lang="en-US"/>
               <a:t>Click to edit Master title style</a:t>
             </a:r>
-            <a:endParaRPr lang="en-US"/>
           </a:p>
         </p:txBody>
       </p:sp>
@@ -1032,7 +1039,7 @@
           <a:p>
             <a:pPr lvl="0"/>
             <a:r>
-              <a:rPr lang="en-US" smtClean="0"/>
+              <a:rPr lang="en-US"/>
               <a:t>Click to edit Master text styles</a:t>
             </a:r>
           </a:p>
@@ -1055,7 +1062,7 @@
           <a:p>
             <a:fld id="{5BCAD085-E8A6-8845-BD4E-CB4CCA059FC4}" type="datetimeFigureOut">
               <a:rPr lang="en-US" smtClean="0"/>
-              <a:t>1/27/13</a:t>
+              <a:t>10/13/26</a:t>
             </a:fld>
             <a:endParaRPr lang="en-US"/>
           </a:p>
@@ -1149,10 +1156,9 @@
           <a:lstStyle/>
           <a:p>
             <a:r>
-              <a:rPr lang="en-US" smtClean="0"/>
+              <a:rPr lang="en-US"/>
               <a:t>Click to edit Master title style</a:t>
             </a:r>
-            <a:endParaRPr lang="en-US"/>
           </a:p>
         </p:txBody>
       </p:sp>
@@ -1206,38 +1212,37 @@
           <a:p>
             <a:pPr lvl="0"/>
             <a:r>
-              <a:rPr lang="en-US" smtClean="0"/>
+              <a:rPr lang="en-US"/>
               <a:t>Click to edit Master text styles</a:t>
             </a:r>
           </a:p>
           <a:p>
             <a:pPr lvl="1"/>
             <a:r>
-              <a:rPr lang="en-US" smtClean="0"/>
+              <a:rPr lang="en-US"/>
               <a:t>Second level</a:t>
             </a:r>
           </a:p>
           <a:p>
             <a:pPr lvl="2"/>
             <a:r>
-              <a:rPr lang="en-US" smtClean="0"/>
+              <a:rPr lang="en-US"/>
               <a:t>Third level</a:t>
             </a:r>
           </a:p>
           <a:p>
             <a:pPr lvl="3"/>
             <a:r>
-              <a:rPr lang="en-US" smtClean="0"/>
+              <a:rPr lang="en-US"/>
               <a:t>Fourth level</a:t>
             </a:r>
           </a:p>
           <a:p>
             <a:pPr lvl="4"/>
             <a:r>
-              <a:rPr lang="en-US" smtClean="0"/>
+              <a:rPr lang="en-US"/>
               <a:t>Fifth level</a:t>
             </a:r>
-            <a:endParaRPr lang="en-US"/>
           </a:p>
         </p:txBody>
       </p:sp>
@@ -1291,38 +1296,37 @@
           <a:p>
             <a:pPr lvl="0"/>
             <a:r>
-              <a:rPr lang="en-US" smtClean="0"/>
+              <a:rPr lang="en-US"/>
               <a:t>Click to edit Master text styles</a:t>
             </a:r>
           </a:p>
           <a:p>
             <a:pPr lvl="1"/>
             <a:r>
-              <a:rPr lang="en-US" smtClean="0"/>
+              <a:rPr lang="en-US"/>
               <a:t>Second level</a:t>
             </a:r>
           </a:p>
           <a:p>
             <a:pPr lvl="2"/>
             <a:r>
-              <a:rPr lang="en-US" smtClean="0"/>
+              <a:rPr lang="en-US"/>
               <a:t>Third level</a:t>
             </a:r>
           </a:p>
           <a:p>
             <a:pPr lvl="3"/>
             <a:r>
-              <a:rPr lang="en-US" smtClean="0"/>
+              <a:rPr lang="en-US"/>
               <a:t>Fourth level</a:t>
             </a:r>
           </a:p>
           <a:p>
             <a:pPr lvl="4"/>
             <a:r>
-              <a:rPr lang="en-US" smtClean="0"/>
+              <a:rPr lang="en-US"/>
               <a:t>Fifth level</a:t>
             </a:r>
-            <a:endParaRPr lang="en-US"/>
           </a:p>
         </p:txBody>
       </p:sp>
@@ -1343,7 +1347,7 @@
           <a:p>
             <a:fld id="{5BCAD085-E8A6-8845-BD4E-CB4CCA059FC4}" type="datetimeFigureOut">
               <a:rPr lang="en-US" smtClean="0"/>
-              <a:t>1/27/13</a:t>
+              <a:t>10/13/26</a:t>
             </a:fld>
             <a:endParaRPr lang="en-US"/>
           </a:p>
@@ -1441,10 +1445,9 @@
           </a:lstStyle>
           <a:p>
             <a:r>
-              <a:rPr lang="en-US" smtClean="0"/>
+              <a:rPr lang="en-US"/>
               <a:t>Click to edit Master title style</a:t>
             </a:r>
-            <a:endParaRPr lang="en-US"/>
           </a:p>
         </p:txBody>
       </p:sp>
@@ -1507,7 +1510,7 @@
           <a:p>
             <a:pPr lvl="0"/>
             <a:r>
-              <a:rPr lang="en-US" smtClean="0"/>
+              <a:rPr lang="en-US"/>
               <a:t>Click to edit Master text styles</a:t>
             </a:r>
           </a:p>
@@ -1563,38 +1566,37 @@
           <a:p>
             <a:pPr lvl="0"/>
             <a:r>
-              <a:rPr lang="en-US" smtClean="0"/>
+              <a:rPr lang="en-US"/>
               <a:t>Click to edit Master text styles</a:t>
             </a:r>
           </a:p>
           <a:p>
             <a:pPr lvl="1"/>
             <a:r>
-              <a:rPr lang="en-US" smtClean="0"/>
+              <a:rPr lang="en-US"/>
               <a:t>Second level</a:t>
             </a:r>
           </a:p>
           <a:p>
             <a:pPr lvl="2"/>
             <a:r>
-              <a:rPr lang="en-US" smtClean="0"/>
+              <a:rPr lang="en-US"/>
               <a:t>Third level</a:t>
             </a:r>
           </a:p>
           <a:p>
             <a:pPr lvl="3"/>
             <a:r>
-              <a:rPr lang="en-US" smtClean="0"/>
+              <a:rPr lang="en-US"/>
               <a:t>Fourth level</a:t>
             </a:r>
           </a:p>
           <a:p>
             <a:pPr lvl="4"/>
             <a:r>
-              <a:rPr lang="en-US" smtClean="0"/>
+              <a:rPr lang="en-US"/>
               <a:t>Fifth level</a:t>
             </a:r>
-            <a:endParaRPr lang="en-US"/>
           </a:p>
         </p:txBody>
       </p:sp>
@@ -1657,7 +1659,7 @@
           <a:p>
             <a:pPr lvl="0"/>
             <a:r>
-              <a:rPr lang="en-US" smtClean="0"/>
+              <a:rPr lang="en-US"/>
               <a:t>Click to edit Master text styles</a:t>
             </a:r>
           </a:p>
@@ -1713,38 +1715,37 @@
           <a:p>
             <a:pPr lvl="0"/>
             <a:r>
-              <a:rPr lang="en-US" smtClean="0"/>
+              <a:rPr lang="en-US"/>
               <a:t>Click to edit Master text styles</a:t>
             </a:r>
           </a:p>
           <a:p>
             <a:pPr lvl="1"/>
             <a:r>
-              <a:rPr lang="en-US" smtClean="0"/>
+              <a:rPr lang="en-US"/>
               <a:t>Second level</a:t>
             </a:r>
           </a:p>
           <a:p>
             <a:pPr lvl="2"/>
             <a:r>
-              <a:rPr lang="en-US" smtClean="0"/>
+              <a:rPr lang="en-US"/>
               <a:t>Third level</a:t>
             </a:r>
           </a:p>
           <a:p>
             <a:pPr lvl="3"/>
             <a:r>
-              <a:rPr lang="en-US" smtClean="0"/>
+              <a:rPr lang="en-US"/>
               <a:t>Fourth level</a:t>
             </a:r>
           </a:p>
           <a:p>
             <a:pPr lvl="4"/>
             <a:r>
-              <a:rPr lang="en-US" smtClean="0"/>
+              <a:rPr lang="en-US"/>
               <a:t>Fifth level</a:t>
             </a:r>
-            <a:endParaRPr lang="en-US"/>
           </a:p>
         </p:txBody>
       </p:sp>
@@ -1765,7 +1766,7 @@
           <a:p>
             <a:fld id="{5BCAD085-E8A6-8845-BD4E-CB4CCA059FC4}" type="datetimeFigureOut">
               <a:rPr lang="en-US" smtClean="0"/>
-              <a:t>1/27/13</a:t>
+              <a:t>10/13/26</a:t>
             </a:fld>
             <a:endParaRPr lang="en-US"/>
           </a:p>
@@ -1859,10 +1860,9 @@
           <a:lstStyle/>
           <a:p>
             <a:r>
-              <a:rPr lang="en-US" smtClean="0"/>
+              <a:rPr lang="en-US"/>
               <a:t>Click to edit Master title style</a:t>
             </a:r>
-            <a:endParaRPr lang="en-US"/>
           </a:p>
         </p:txBody>
       </p:sp>
@@ -1883,7 +1883,7 @@
           <a:p>
             <a:fld id="{5BCAD085-E8A6-8845-BD4E-CB4CCA059FC4}" type="datetimeFigureOut">
               <a:rPr lang="en-US" smtClean="0"/>
-              <a:t>1/27/13</a:t>
+              <a:t>10/13/26</a:t>
             </a:fld>
             <a:endParaRPr lang="en-US"/>
           </a:p>
@@ -1978,7 +1978,7 @@
           <a:p>
             <a:fld id="{5BCAD085-E8A6-8845-BD4E-CB4CCA059FC4}" type="datetimeFigureOut">
               <a:rPr lang="en-US" smtClean="0"/>
-              <a:t>1/27/13</a:t>
+              <a:t>10/13/26</a:t>
             </a:fld>
             <a:endParaRPr lang="en-US"/>
           </a:p>
@@ -2081,10 +2081,9 @@
           </a:lstStyle>
           <a:p>
             <a:r>
-              <a:rPr lang="en-US" smtClean="0"/>
+              <a:rPr lang="en-US"/>
               <a:t>Click to edit Master title style</a:t>
             </a:r>
-            <a:endParaRPr lang="en-US"/>
           </a:p>
         </p:txBody>
       </p:sp>
@@ -2138,38 +2137,37 @@
           <a:p>
             <a:pPr lvl="0"/>
             <a:r>
-              <a:rPr lang="en-US" smtClean="0"/>
+              <a:rPr lang="en-US"/>
               <a:t>Click to edit Master text styles</a:t>
             </a:r>
           </a:p>
           <a:p>
             <a:pPr lvl="1"/>
             <a:r>
-              <a:rPr lang="en-US" smtClean="0"/>
+              <a:rPr lang="en-US"/>
               <a:t>Second level</a:t>
             </a:r>
           </a:p>
           <a:p>
             <a:pPr lvl="2"/>
             <a:r>
-              <a:rPr lang="en-US" smtClean="0"/>
+              <a:rPr lang="en-US"/>
               <a:t>Third level</a:t>
             </a:r>
           </a:p>
           <a:p>
             <a:pPr lvl="3"/>
             <a:r>
-              <a:rPr lang="en-US" smtClean="0"/>
+              <a:rPr lang="en-US"/>
               <a:t>Fourth level</a:t>
             </a:r>
           </a:p>
           <a:p>
             <a:pPr lvl="4"/>
             <a:r>
-              <a:rPr lang="en-US" smtClean="0"/>
+              <a:rPr lang="en-US"/>
               <a:t>Fifth level</a:t>
             </a:r>
-            <a:endParaRPr lang="en-US"/>
           </a:p>
         </p:txBody>
       </p:sp>
@@ -2232,7 +2230,7 @@
           <a:p>
             <a:pPr lvl="0"/>
             <a:r>
-              <a:rPr lang="en-US" smtClean="0"/>
+              <a:rPr lang="en-US"/>
               <a:t>Click to edit Master text styles</a:t>
             </a:r>
           </a:p>
@@ -2255,7 +2253,7 @@
           <a:p>
             <a:fld id="{5BCAD085-E8A6-8845-BD4E-CB4CCA059FC4}" type="datetimeFigureOut">
               <a:rPr lang="en-US" smtClean="0"/>
-              <a:t>1/27/13</a:t>
+              <a:t>10/13/26</a:t>
             </a:fld>
             <a:endParaRPr lang="en-US"/>
           </a:p>
@@ -2358,10 +2356,9 @@
           </a:lstStyle>
           <a:p>
             <a:r>
-              <a:rPr lang="en-US" smtClean="0"/>
+              <a:rPr lang="en-US"/>
               <a:t>Click to edit Master title style</a:t>
             </a:r>
-            <a:endParaRPr lang="en-US"/>
           </a:p>
         </p:txBody>
       </p:sp>
@@ -2485,7 +2482,7 @@
           <a:p>
             <a:pPr lvl="0"/>
             <a:r>
-              <a:rPr lang="en-US" smtClean="0"/>
+              <a:rPr lang="en-US"/>
               <a:t>Click to edit Master text styles</a:t>
             </a:r>
           </a:p>
@@ -2508,7 +2505,7 @@
           <a:p>
             <a:fld id="{5BCAD085-E8A6-8845-BD4E-CB4CCA059FC4}" type="datetimeFigureOut">
               <a:rPr lang="en-US" smtClean="0"/>
-              <a:t>1/27/13</a:t>
+              <a:t>10/13/26</a:t>
             </a:fld>
             <a:endParaRPr lang="en-US"/>
           </a:p>
@@ -2617,10 +2614,9 @@
           <a:lstStyle/>
           <a:p>
             <a:r>
-              <a:rPr lang="en-US" smtClean="0"/>
+              <a:rPr lang="en-US"/>
               <a:t>Click to edit Master title style</a:t>
             </a:r>
-            <a:endParaRPr lang="en-US"/>
           </a:p>
         </p:txBody>
       </p:sp>
@@ -2651,38 +2647,37 @@
           <a:p>
             <a:pPr lvl="0"/>
             <a:r>
-              <a:rPr lang="en-US" smtClean="0"/>
+              <a:rPr lang="en-US"/>
               <a:t>Click to edit Master text styles</a:t>
             </a:r>
           </a:p>
           <a:p>
             <a:pPr lvl="1"/>
             <a:r>
-              <a:rPr lang="en-US" smtClean="0"/>
+              <a:rPr lang="en-US"/>
               <a:t>Second level</a:t>
             </a:r>
           </a:p>
           <a:p>
             <a:pPr lvl="2"/>
             <a:r>
-              <a:rPr lang="en-US" smtClean="0"/>
+              <a:rPr lang="en-US"/>
               <a:t>Third level</a:t>
             </a:r>
           </a:p>
           <a:p>
             <a:pPr lvl="3"/>
             <a:r>
-              <a:rPr lang="en-US" smtClean="0"/>
+              <a:rPr lang="en-US"/>
               <a:t>Fourth level</a:t>
             </a:r>
           </a:p>
           <a:p>
             <a:pPr lvl="4"/>
             <a:r>
-              <a:rPr lang="en-US" smtClean="0"/>
+              <a:rPr lang="en-US"/>
               <a:t>Fifth level</a:t>
             </a:r>
-            <a:endParaRPr lang="en-US"/>
           </a:p>
         </p:txBody>
       </p:sp>
@@ -2721,7 +2716,7 @@
           <a:p>
             <a:fld id="{5BCAD085-E8A6-8845-BD4E-CB4CCA059FC4}" type="datetimeFigureOut">
               <a:rPr lang="en-US" smtClean="0"/>
-              <a:t>1/27/13</a:t>
+              <a:t>10/13/26</a:t>
             </a:fld>
             <a:endParaRPr lang="en-US"/>
           </a:p>
@@ -3080,7 +3075,7 @@
 </file>
 
 <file path=ppt/slides/slide1.xml><?xml version="1.0" encoding="utf-8"?>
-<p:sld xmlns:a="http://schemas.openxmlformats.org/drawingml/2006/main" xmlns:p="http://schemas.openxmlformats.org/presentationml/2006/main" xmlns:r="http://schemas.openxmlformats.org/officeDocument/2006/relationships">
+<p:sld xmlns:a="http://schemas.openxmlformats.org/drawingml/2006/main" xmlns:r="http://schemas.openxmlformats.org/officeDocument/2006/relationships" xmlns:p="http://schemas.openxmlformats.org/presentationml/2006/main">
   <p:cSld>
     <p:spTree>
       <p:nvGrpSpPr>
@@ -3088,7 +3083,14 @@
         <p:cNvGrpSpPr/>
         <p:nvPr/>
       </p:nvGrpSpPr>
-      <p:grpSpPr/>
+      <p:grpSpPr>
+        <a:xfrm>
+          <a:off x="0" y="0"/>
+          <a:ext cx="0" cy="0"/>
+          <a:chOff x="0" y="0"/>
+          <a:chExt cx="0" cy="0"/>
+        </a:xfrm>
+      </p:grpSpPr>
       <p:sp>
         <p:nvSpPr>
           <p:cNvPr id="2" name="TextBox 1"/>
@@ -3218,7 +3220,7 @@
   <p:clrMapOvr>
     <a:masterClrMapping/>
   </p:clrMapOvr>
-  <p:timing xmlns:p14="http://schemas.microsoft.com/office/powerpoint/2010/main" xmlns:mc="http://schemas.openxmlformats.org/markup-compatibility/2006">
+  <p:timing>
     <p:tnLst>
       <p:par>
         <p:cTn id="1" dur="indefinite" restart="never" nodeType="tmRoot">
@@ -3227,26 +3229,30 @@
               <p:cTn id="2" dur="indefinite" nodeType="mainSeq">
                 <p:childTnLst>
                   <p:par>
-                    <p:cTn id="10" fill="hold">
+                    <p:cTn id="3" fill="hold">
                       <p:stCondLst>
                         <p:cond delay="indefinite"/>
                       </p:stCondLst>
                       <p:childTnLst>
                         <p:par>
-                          <p:cTn id="11" fill="hold">
+                          <p:cTn id="4" fill="hold">
                             <p:stCondLst>
                               <p:cond delay="0"/>
                             </p:stCondLst>
                             <p:childTnLst>
                               <p:par>
-                                <p:cTn id="12" presetID="10" presetClass="entr" presetSubtype="0" fill="hold" nodeType="clickEffect">
+                                <p:cTn id="5" presetID="1" presetClass="entr" presetSubtype="0" fill="hold" grpId="0" nodeType="clickEffect">
                                   <p:stCondLst>
                                     <p:cond delay="0"/>
                                   </p:stCondLst>
                                   <p:childTnLst>
                                     <p:set>
                                       <p:cBhvr>
-                                        <p:cTn id="100" dur="1" fill="hold"/>
+                                        <p:cTn id="6" dur="1" fill="hold">
+                                          <p:stCondLst>
+                                            <p:cond delay="0"/>
+                                          </p:stCondLst>
+                                        </p:cTn>
                                         <p:tgtEl>
                                           <p:spTgt spid="2"/>
                                         </p:tgtEl>
@@ -3268,26 +3274,30 @@
                     </p:cTn>
                   </p:par>
                   <p:par>
-                    <p:cTn id="13" fill="hold">
+                    <p:cTn id="7" fill="hold">
                       <p:stCondLst>
                         <p:cond delay="indefinite"/>
                       </p:stCondLst>
                       <p:childTnLst>
                         <p:par>
-                          <p:cTn id="14" fill="hold">
+                          <p:cTn id="8" fill="hold">
                             <p:stCondLst>
                               <p:cond delay="0"/>
                             </p:stCondLst>
                             <p:childTnLst>
                               <p:par>
-                                <p:cTn id="15" presetID="10" presetClass="entr" presetSubtype="0" fill="hold" nodeType="clickEffect">
+                                <p:cTn id="9" presetID="1" presetClass="entr" presetSubtype="0" fill="hold" grpId="0" nodeType="clickEffect">
                                   <p:stCondLst>
                                     <p:cond delay="0"/>
                                   </p:stCondLst>
                                   <p:childTnLst>
                                     <p:set>
                                       <p:cBhvr>
-                                        <p:cTn id="101" dur="1" fill="hold"/>
+                                        <p:cTn id="10" dur="1" fill="hold">
+                                          <p:stCondLst>
+                                            <p:cond delay="0"/>
+                                          </p:stCondLst>
+                                        </p:cTn>
                                         <p:tgtEl>
                                           <p:spTgt spid="3"/>
                                         </p:tgtEl>
@@ -3309,26 +3319,30 @@
                     </p:cTn>
                   </p:par>
                   <p:par>
-                    <p:cTn id="16" fill="hold">
+                    <p:cTn id="11" fill="hold">
                       <p:stCondLst>
                         <p:cond delay="indefinite"/>
                       </p:stCondLst>
                       <p:childTnLst>
                         <p:par>
-                          <p:cTn id="17" fill="hold">
+                          <p:cTn id="12" fill="hold">
                             <p:stCondLst>
                               <p:cond delay="0"/>
                             </p:stCondLst>
                             <p:childTnLst>
                               <p:par>
-                                <p:cTn id="18" presetID="10" presetClass="entr" presetSubtype="0" fill="hold" nodeType="clickEffect">
+                                <p:cTn id="13" presetID="1" presetClass="entr" presetSubtype="0" fill="hold" grpId="0" nodeType="clickEffect">
                                   <p:stCondLst>
                                     <p:cond delay="0"/>
                                   </p:stCondLst>
                                   <p:childTnLst>
                                     <p:set>
                                       <p:cBhvr>
-                                        <p:cTn id="102" dur="1" fill="hold"/>
+                                        <p:cTn id="14" dur="1" fill="hold">
+                                          <p:stCondLst>
+                                            <p:cond delay="0"/>
+                                          </p:stCondLst>
+                                        </p:cTn>
                                         <p:tgtEl>
                                           <p:spTgt spid="4"/>
                                         </p:tgtEl>
@@ -3350,26 +3364,30 @@
                     </p:cTn>
                   </p:par>
                   <p:par>
-                    <p:cTn id="19" fill="hold">
+                    <p:cTn id="15" fill="hold">
                       <p:stCondLst>
                         <p:cond delay="indefinite"/>
                       </p:stCondLst>
                       <p:childTnLst>
                         <p:par>
-                          <p:cTn id="20" fill="hold">
+                          <p:cTn id="16" fill="hold">
                             <p:stCondLst>
                               <p:cond delay="0"/>
                             </p:stCondLst>
                             <p:childTnLst>
                               <p:par>
-                                <p:cTn id="21" presetID="10" presetClass="entr" presetSubtype="0" fill="hold" nodeType="clickEffect">
+                                <p:cTn id="17" presetID="1" presetClass="entr" presetSubtype="0" fill="hold" grpId="0" nodeType="clickEffect">
                                   <p:stCondLst>
                                     <p:cond delay="0"/>
                                   </p:stCondLst>
                                   <p:childTnLst>
                                     <p:set>
                                       <p:cBhvr>
-                                        <p:cTn id="103" dur="1" fill="hold"/>
+                                        <p:cTn id="18" dur="1" fill="hold">
+                                          <p:stCondLst>
+                                            <p:cond delay="0"/>
+                                          </p:stCondLst>
+                                        </p:cTn>
                                         <p:tgtEl>
                                           <p:spTgt spid="5"/>
                                         </p:tgtEl>
@@ -3392,17 +3410,37 @@
                   </p:par>
                 </p:childTnLst>
               </p:cTn>
+              <p:prevCondLst>
+                <p:cond evt="onPrev" delay="0">
+                  <p:tgtEl>
+                    <p:sldTgt/>
+                  </p:tgtEl>
+                </p:cond>
+              </p:prevCondLst>
+              <p:nextCondLst>
+                <p:cond evt="onNext" delay="0">
+                  <p:tgtEl>
+                    <p:sldTgt/>
+                  </p:tgtEl>
+                </p:cond>
+              </p:nextCondLst>
             </p:seq>
           </p:childTnLst>
         </p:cTn>
       </p:par>
     </p:tnLst>
+    <p:bldLst>
+      <p:bldP spid="2" grpId="0"/>
+      <p:bldP spid="3" grpId="0"/>
+      <p:bldP spid="4" grpId="0"/>
+      <p:bldP spid="5" grpId="0"/>
+    </p:bldLst>
   </p:timing>
 </p:sld>
 </file>
 
 <file path=ppt/slides/slide2.xml><?xml version="1.0" encoding="utf-8"?>
-<p:sld xmlns:a="http://schemas.openxmlformats.org/drawingml/2006/main" xmlns:p="http://schemas.openxmlformats.org/presentationml/2006/main" xmlns:r="http://schemas.openxmlformats.org/officeDocument/2006/relationships">
+<p:sld xmlns:a="http://schemas.openxmlformats.org/drawingml/2006/main" xmlns:r="http://schemas.openxmlformats.org/officeDocument/2006/relationships" xmlns:p="http://schemas.openxmlformats.org/presentationml/2006/main">
   <p:cSld>
     <p:spTree>
       <p:nvGrpSpPr>
@@ -3410,7 +3448,14 @@
         <p:cNvGrpSpPr/>
         <p:nvPr/>
       </p:nvGrpSpPr>
-      <p:grpSpPr/>
+      <p:grpSpPr>
+        <a:xfrm>
+          <a:off x="0" y="0"/>
+          <a:ext cx="0" cy="0"/>
+          <a:chOff x="0" y="0"/>
+          <a:chExt cx="0" cy="0"/>
+        </a:xfrm>
+      </p:grpSpPr>
       <p:sp>
         <p:nvSpPr>
           <p:cNvPr id="2" name="TextBox 1"/>
@@ -3447,7 +3492,7 @@
   <p:clrMapOvr>
     <a:masterClrMapping/>
   </p:clrMapOvr>
-  <p:timing xmlns:p14="http://schemas.microsoft.com/office/powerpoint/2010/main" xmlns:mc="http://schemas.openxmlformats.org/markup-compatibility/2006">
+  <p:timing>
     <p:tnLst>
       <p:par>
         <p:cTn id="1" dur="indefinite" restart="never" nodeType="tmRoot">
@@ -3456,26 +3501,30 @@
               <p:cTn id="2" dur="indefinite" nodeType="mainSeq">
                 <p:childTnLst>
                   <p:par>
-                    <p:cTn id="10" fill="hold">
+                    <p:cTn id="3" fill="hold">
                       <p:stCondLst>
                         <p:cond delay="indefinite"/>
                       </p:stCondLst>
                       <p:childTnLst>
                         <p:par>
-                          <p:cTn id="11" fill="hold">
+                          <p:cTn id="4" fill="hold">
                             <p:stCondLst>
                               <p:cond delay="0"/>
                             </p:stCondLst>
                             <p:childTnLst>
                               <p:par>
-                                <p:cTn id="12" presetID="10" presetClass="exit" presetSubtype="0" fill="hold" nodeType="clickEffect">
+                                <p:cTn id="5" presetID="1" presetClass="exit" presetSubtype="0" fill="hold" grpId="0" nodeType="clickEffect">
                                   <p:stCondLst>
                                     <p:cond delay="0"/>
                                   </p:stCondLst>
                                   <p:childTnLst>
                                     <p:set>
                                       <p:cBhvr>
-                                        <p:cTn id="100" dur="1" fill="hold"/>
+                                        <p:cTn id="6" dur="1" fill="hold">
+                                          <p:stCondLst>
+                                            <p:cond delay="0"/>
+                                          </p:stCondLst>
+                                        </p:cTn>
                                         <p:tgtEl>
                                           <p:spTgt spid="2"/>
                                         </p:tgtEl>
@@ -3498,11 +3547,28 @@
                   </p:par>
                 </p:childTnLst>
               </p:cTn>
+              <p:prevCondLst>
+                <p:cond evt="onPrev" delay="0">
+                  <p:tgtEl>
+                    <p:sldTgt/>
+                  </p:tgtEl>
+                </p:cond>
+              </p:prevCondLst>
+              <p:nextCondLst>
+                <p:cond evt="onNext" delay="0">
+                  <p:tgtEl>
+                    <p:sldTgt/>
+                  </p:tgtEl>
+                </p:cond>
+              </p:nextCondLst>
             </p:seq>
           </p:childTnLst>
         </p:cTn>
       </p:par>
     </p:tnLst>
+    <p:bldLst>
+      <p:bldP spid="2" grpId="0"/>
+    </p:bldLst>
   </p:timing>
 </p:sld>
 </file>
